--- a/Presentation/POC_presentation_content.pptx
+++ b/Presentation/POC_presentation_content.pptx
@@ -104,12 +104,18 @@
       </a:defRPr>
     </a:lvl9pPr>
   </p:defaultTextStyle>
+  <p:extLst>
+    <p:ext uri="{EFAFB233-063F-42B5-8137-9DF3F51BA10A}">
+      <p15:sldGuideLst xmlns:p15="http://schemas.microsoft.com/office/powerpoint/2012/main"/>
+    </p:ext>
+  </p:extLst>
 </p:presentation>
 </file>
 
 <file path=ppt/revisionInfo.xml><?xml version="1.0" encoding="utf-8"?>
 <p1510:revInfo xmlns:a="http://schemas.openxmlformats.org/drawingml/2006/main" xmlns:r="http://schemas.openxmlformats.org/officeDocument/2006/relationships" xmlns:p1510="http://schemas.microsoft.com/office/powerpoint/2015/10/main">
   <p1510:revLst>
+    <p1510:client id="{BE07F81F-31BA-4278-98C2-76805C2E7C83}" v="2" dt="2026-06-24T10:39:56.781"/>
     <p1510:client id="{F8D7D2EE-F6B6-41F9-AB45-E138788FDCF6}" v="1" dt="2026-06-23T12:45:45.774"/>
   </p1510:revLst>
 </p1510:revInfo>
@@ -117,6 +123,30 @@
 
 <file path=ppt/changesInfos/changesInfo1.xml><?xml version="1.0" encoding="utf-8"?>
 <pc:chgInfo xmlns:a="http://schemas.openxmlformats.org/drawingml/2006/main" xmlns:r="http://schemas.openxmlformats.org/officeDocument/2006/relationships" xmlns:ac="http://schemas.microsoft.com/office/drawing/2013/main/command" xmlns:pc="http://schemas.microsoft.com/office/powerpoint/2013/main/command">
+  <pc:docChgLst>
+    <pc:chgData name="Shira Shmuely" userId="8a3edc0d-abc0-46da-9329-2a4592cfdfd3" providerId="ADAL" clId="{19831F87-7DC5-4435-8F43-5F041B964954}"/>
+    <pc:docChg chg="undo custSel modSld">
+      <pc:chgData name="Shira Shmuely" userId="8a3edc0d-abc0-46da-9329-2a4592cfdfd3" providerId="ADAL" clId="{19831F87-7DC5-4435-8F43-5F041B964954}" dt="2026-06-24T10:41:23.629" v="500" actId="20577"/>
+      <pc:docMkLst>
+        <pc:docMk/>
+      </pc:docMkLst>
+      <pc:sldChg chg="modSp mod">
+        <pc:chgData name="Shira Shmuely" userId="8a3edc0d-abc0-46da-9329-2a4592cfdfd3" providerId="ADAL" clId="{19831F87-7DC5-4435-8F43-5F041B964954}" dt="2026-06-24T10:41:23.629" v="500" actId="20577"/>
+        <pc:sldMkLst>
+          <pc:docMk/>
+          <pc:sldMk cId="2667930858" sldId="256"/>
+        </pc:sldMkLst>
+        <pc:spChg chg="mod">
+          <ac:chgData name="Shira Shmuely" userId="8a3edc0d-abc0-46da-9329-2a4592cfdfd3" providerId="ADAL" clId="{19831F87-7DC5-4435-8F43-5F041B964954}" dt="2026-06-24T10:41:23.629" v="500" actId="20577"/>
+          <ac:spMkLst>
+            <pc:docMk/>
+            <pc:sldMk cId="2667930858" sldId="256"/>
+            <ac:spMk id="6" creationId="{D404C5F7-ED12-ECDB-EA51-303607F28BA3}"/>
+          </ac:spMkLst>
+        </pc:spChg>
+      </pc:sldChg>
+    </pc:docChg>
+  </pc:docChgLst>
   <pc:docChgLst>
     <pc:chgData name="Shira Shmuely" userId="8a3edc0d-abc0-46da-9329-2a4592cfdfd3" providerId="ADAL" clId="{65A16247-AA8A-43A2-9D1A-B736727B90AD}"/>
     <pc:docChg chg="undo custSel delSld modSld">
@@ -305,7 +335,7 @@
           <a:p>
             <a:fld id="{F77D4E7F-3A56-4AAA-AA74-4AAA8ACF2A0D}" type="datetimeFigureOut">
               <a:rPr lang="en-US" smtClean="0"/>
-              <a:t>6/23/2026</a:t>
+              <a:t>6/24/2026</a:t>
             </a:fld>
             <a:endParaRPr lang="en-US"/>
           </a:p>
@@ -503,7 +533,7 @@
           <a:p>
             <a:fld id="{F77D4E7F-3A56-4AAA-AA74-4AAA8ACF2A0D}" type="datetimeFigureOut">
               <a:rPr lang="en-US" smtClean="0"/>
-              <a:t>6/23/2026</a:t>
+              <a:t>6/24/2026</a:t>
             </a:fld>
             <a:endParaRPr lang="en-US"/>
           </a:p>
@@ -711,7 +741,7 @@
           <a:p>
             <a:fld id="{F77D4E7F-3A56-4AAA-AA74-4AAA8ACF2A0D}" type="datetimeFigureOut">
               <a:rPr lang="en-US" smtClean="0"/>
-              <a:t>6/23/2026</a:t>
+              <a:t>6/24/2026</a:t>
             </a:fld>
             <a:endParaRPr lang="en-US"/>
           </a:p>
@@ -909,7 +939,7 @@
           <a:p>
             <a:fld id="{F77D4E7F-3A56-4AAA-AA74-4AAA8ACF2A0D}" type="datetimeFigureOut">
               <a:rPr lang="en-US" smtClean="0"/>
-              <a:t>6/23/2026</a:t>
+              <a:t>6/24/2026</a:t>
             </a:fld>
             <a:endParaRPr lang="en-US"/>
           </a:p>
@@ -1184,7 +1214,7 @@
           <a:p>
             <a:fld id="{F77D4E7F-3A56-4AAA-AA74-4AAA8ACF2A0D}" type="datetimeFigureOut">
               <a:rPr lang="en-US" smtClean="0"/>
-              <a:t>6/23/2026</a:t>
+              <a:t>6/24/2026</a:t>
             </a:fld>
             <a:endParaRPr lang="en-US"/>
           </a:p>
@@ -1449,7 +1479,7 @@
           <a:p>
             <a:fld id="{F77D4E7F-3A56-4AAA-AA74-4AAA8ACF2A0D}" type="datetimeFigureOut">
               <a:rPr lang="en-US" smtClean="0"/>
-              <a:t>6/23/2026</a:t>
+              <a:t>6/24/2026</a:t>
             </a:fld>
             <a:endParaRPr lang="en-US"/>
           </a:p>
@@ -1861,7 +1891,7 @@
           <a:p>
             <a:fld id="{F77D4E7F-3A56-4AAA-AA74-4AAA8ACF2A0D}" type="datetimeFigureOut">
               <a:rPr lang="en-US" smtClean="0"/>
-              <a:t>6/23/2026</a:t>
+              <a:t>6/24/2026</a:t>
             </a:fld>
             <a:endParaRPr lang="en-US"/>
           </a:p>
@@ -2002,7 +2032,7 @@
           <a:p>
             <a:fld id="{F77D4E7F-3A56-4AAA-AA74-4AAA8ACF2A0D}" type="datetimeFigureOut">
               <a:rPr lang="en-US" smtClean="0"/>
-              <a:t>6/23/2026</a:t>
+              <a:t>6/24/2026</a:t>
             </a:fld>
             <a:endParaRPr lang="en-US"/>
           </a:p>
@@ -2115,7 +2145,7 @@
           <a:p>
             <a:fld id="{F77D4E7F-3A56-4AAA-AA74-4AAA8ACF2A0D}" type="datetimeFigureOut">
               <a:rPr lang="en-US" smtClean="0"/>
-              <a:t>6/23/2026</a:t>
+              <a:t>6/24/2026</a:t>
             </a:fld>
             <a:endParaRPr lang="en-US"/>
           </a:p>
@@ -2426,7 +2456,7 @@
           <a:p>
             <a:fld id="{F77D4E7F-3A56-4AAA-AA74-4AAA8ACF2A0D}" type="datetimeFigureOut">
               <a:rPr lang="en-US" smtClean="0"/>
-              <a:t>6/23/2026</a:t>
+              <a:t>6/24/2026</a:t>
             </a:fld>
             <a:endParaRPr lang="en-US"/>
           </a:p>
@@ -2714,7 +2744,7 @@
           <a:p>
             <a:fld id="{F77D4E7F-3A56-4AAA-AA74-4AAA8ACF2A0D}" type="datetimeFigureOut">
               <a:rPr lang="en-US" smtClean="0"/>
-              <a:t>6/23/2026</a:t>
+              <a:t>6/24/2026</a:t>
             </a:fld>
             <a:endParaRPr lang="en-US"/>
           </a:p>
@@ -2955,7 +2985,7 @@
           <a:p>
             <a:fld id="{F77D4E7F-3A56-4AAA-AA74-4AAA8ACF2A0D}" type="datetimeFigureOut">
               <a:rPr lang="en-US" smtClean="0"/>
-              <a:t>6/23/2026</a:t>
+              <a:t>6/24/2026</a:t>
             </a:fld>
             <a:endParaRPr lang="en-US"/>
           </a:p>
@@ -3562,7 +3592,7 @@
         <p:spPr>
           <a:xfrm>
             <a:off x="6097524" y="-406251"/>
-            <a:ext cx="6094476" cy="8125301"/>
+            <a:ext cx="6094476" cy="9510296"/>
           </a:xfrm>
           <a:prstGeom prst="rect">
             <a:avLst/>
@@ -3631,7 +3661,7 @@
             </a:pPr>
             <a:r>
               <a:rPr lang="en-US" dirty="0"/>
-              <a:t>Designed &amp; printed pen mount</a:t>
+              <a:t>Designed &amp; printed pen mount – which doesn’t fit the current drawing tool…</a:t>
             </a:r>
           </a:p>
           <a:p>
@@ -3651,39 +3681,7 @@
             </a:pPr>
             <a:r>
               <a:rPr lang="en-US" dirty="0"/>
-              <a:t>Approaching the page – originally done using force mode, now done </a:t>
-            </a:r>
-            <a:r>
-              <a:rPr lang="en-US" dirty="0" err="1"/>
-              <a:t>rigidl</a:t>
-            </a:r>
-            <a:r>
-              <a:rPr lang="en-US" dirty="0"/>
-              <a:t>  applying manual control </a:t>
-            </a:r>
-            <a:r>
-              <a:rPr lang="en-US" dirty="0">
-                <a:solidFill>
-                  <a:srgbClr val="FF0000"/>
-                </a:solidFill>
-              </a:rPr>
-              <a:t>(still don’t get  the </a:t>
-            </a:r>
-            <a:r>
-              <a:rPr lang="en-US" dirty="0" err="1">
-                <a:solidFill>
-                  <a:srgbClr val="FF0000"/>
-                </a:solidFill>
-              </a:rPr>
-              <a:t>differencr</a:t>
-            </a:r>
-            <a:r>
-              <a:rPr lang="en-US" dirty="0">
-                <a:solidFill>
-                  <a:srgbClr val="FF0000"/>
-                </a:solidFill>
-              </a:rPr>
-              <a:t>)</a:t>
+              <a:t>Approaching the page – originally done using force mode, now done rigidly  applying manual control (our hypothesis is force mode didn’t work because of velocity parameter, we may try this again)</a:t>
             </a:r>
           </a:p>
           <a:p>
@@ -3701,7 +3699,15 @@
             </a:r>
             <a:r>
               <a:rPr lang="en-US" dirty="0"/>
-              <a:t>, </a:t>
+              <a:t> (position control gets higher priority than </a:t>
+            </a:r>
+            <a:r>
+              <a:rPr lang="en-US" dirty="0" err="1"/>
+              <a:t>forcemode</a:t>
+            </a:r>
+            <a:r>
+              <a:rPr lang="en-US" dirty="0"/>
+              <a:t> control), </a:t>
             </a:r>
             <a:r>
               <a:rPr lang="en-US" dirty="0" err="1"/>
@@ -3709,15 +3715,15 @@
             </a:r>
             <a:r>
               <a:rPr lang="en-US" dirty="0"/>
-              <a:t> and </a:t>
-            </a:r>
-            <a:r>
-              <a:rPr lang="en-US" dirty="0" err="1"/>
-              <a:t>movePath</a:t>
+              <a:t> (</a:t>
+            </a:r>
+            <a:r>
+              <a:rPr lang="en-IL" dirty="0"/>
+              <a:t>allows you to inject positions in real-time</a:t>
             </a:r>
             <a:r>
               <a:rPr lang="en-US" dirty="0"/>
-              <a:t> (smoother but doesn’t allow </a:t>
+              <a:t> - </a:t>
             </a:r>
             <a:r>
               <a:rPr lang="en-US" dirty="0" err="1"/>
@@ -3725,7 +3731,7 @@
             </a:r>
             <a:r>
               <a:rPr lang="en-US" dirty="0"/>
-              <a:t>)</a:t>
+              <a:t> works best)</a:t>
             </a:r>
           </a:p>
           <a:p>
@@ -3735,7 +3741,7 @@
             </a:pPr>
             <a:r>
               <a:rPr lang="en-US" dirty="0"/>
-              <a:t>Challenges: while validating that the pen had reached the page (as opposed to high force values as result of noise), the marker lingers and causes an ink stain, we want to find a way to get rid of it</a:t>
+              <a:t>Challenges: while validating that the pen had reached the page (as opposed to high force values as result of noise), the marker lingers and causes an ink stain, we want to find a way to get rid of it, might be as simple as changing our drawing tool</a:t>
             </a:r>
           </a:p>
           <a:p>
@@ -3745,8 +3751,13 @@
             </a:pPr>
             <a:r>
               <a:rPr lang="en-US" dirty="0"/>
-              <a:t>POC goals reached? &lt;- page plane calibration is a maybe for now</a:t>
-            </a:r>
+              <a:t>POC </a:t>
+            </a:r>
+            <a:r>
+              <a:rPr lang="en-US"/>
+              <a:t>goals reached</a:t>
+            </a:r>
+            <a:endParaRPr lang="en-US" dirty="0"/>
           </a:p>
           <a:p>
             <a:pPr marL="800100" lvl="1" indent="-342900">
@@ -3761,7 +3772,7 @@
           <a:p>
             <a:pPr lvl="1"/>
             <a:r>
-              <a:rPr lang="en-US">
+              <a:rPr lang="en-US" dirty="0">
                 <a:solidFill>
                   <a:srgbClr val="FF0000"/>
                 </a:solidFill>
